--- a/student dashboard.pptx
+++ b/student dashboard.pptx
@@ -108,7 +108,33 @@
       </a:defRPr>
     </a:lvl9pPr>
   </p:defaultTextStyle>
+  <p:extLst>
+    <p:ext uri="{EFAFB233-063F-42B5-8137-9DF3F51BA10A}">
+      <p15:sldGuideLst xmlns:p15="http://schemas.microsoft.com/office/powerpoint/2012/main"/>
+    </p:ext>
+  </p:extLst>
 </p:presentation>
+</file>
+
+<file path=ppt/changesInfos/changesInfo1.xml><?xml version="1.0" encoding="utf-8"?>
+<pc:chgInfo xmlns:a="http://schemas.openxmlformats.org/drawingml/2006/main" xmlns:r="http://schemas.openxmlformats.org/officeDocument/2006/relationships" xmlns:ac="http://schemas.microsoft.com/office/drawing/2013/main/command" xmlns:pc="http://schemas.microsoft.com/office/powerpoint/2013/main/command">
+  <pc:docChgLst>
+    <pc:chgData name="hauwa Bappa" userId="d7443a9696cfb9a2" providerId="LiveId" clId="{F6B4B44A-1D72-4AD7-B653-4ECA5F6E14C9}"/>
+    <pc:docChg chg="addSld delSld modSld sldOrd">
+      <pc:chgData name="hauwa Bappa" userId="d7443a9696cfb9a2" providerId="LiveId" clId="{F6B4B44A-1D72-4AD7-B653-4ECA5F6E14C9}" dt="2026-04-18T15:54:43.119" v="3" actId="2696"/>
+      <pc:docMkLst>
+        <pc:docMk/>
+      </pc:docMkLst>
+      <pc:sldChg chg="new del ord">
+        <pc:chgData name="hauwa Bappa" userId="d7443a9696cfb9a2" providerId="LiveId" clId="{F6B4B44A-1D72-4AD7-B653-4ECA5F6E14C9}" dt="2026-04-18T15:54:43.119" v="3" actId="2696"/>
+        <pc:sldMkLst>
+          <pc:docMk/>
+          <pc:sldMk cId="311076797" sldId="261"/>
+        </pc:sldMkLst>
+      </pc:sldChg>
+    </pc:docChg>
+  </pc:docChgLst>
+</pc:chgInfo>
 </file>
 
 <file path=ppt/slideLayouts/slideLayout1.xml><?xml version="1.0" encoding="utf-8"?>
